--- a/output/part8_logs.pptx
+++ b/output/part8_logs.pptx
@@ -4775,7 +4775,7 @@
         <p:spPr>
           <a:xfrm>
             <a:off x="6675120" y="3447288"/>
-            <a:ext cx="384048" cy="0"/>
+            <a:ext cx="384048" cy="9144"/>
           </a:xfrm>
           <a:prstGeom prst="line">
             <a:avLst/>
@@ -10856,7 +10856,7 @@
         <p:spPr>
           <a:xfrm>
             <a:off x="1554480" y="1325880"/>
-            <a:ext cx="320040" cy="0"/>
+            <a:ext cx="320040" cy="9144"/>
           </a:xfrm>
           <a:prstGeom prst="line">
             <a:avLst/>
@@ -11084,7 +11084,7 @@
         <p:spPr>
           <a:xfrm>
             <a:off x="3337560" y="1325880"/>
-            <a:ext cx="347472" cy="0"/>
+            <a:ext cx="347472" cy="9144"/>
           </a:xfrm>
           <a:prstGeom prst="line">
             <a:avLst/>
@@ -11312,7 +11312,7 @@
         <p:spPr>
           <a:xfrm>
             <a:off x="5148072" y="1325880"/>
-            <a:ext cx="347472" cy="0"/>
+            <a:ext cx="347472" cy="9144"/>
           </a:xfrm>
           <a:prstGeom prst="line">
             <a:avLst/>
@@ -11557,7 +11557,7 @@
         <p:spPr>
           <a:xfrm>
             <a:off x="6958584" y="1325880"/>
-            <a:ext cx="347472" cy="0"/>
+            <a:ext cx="347472" cy="9144"/>
           </a:xfrm>
           <a:prstGeom prst="line">
             <a:avLst/>
@@ -16266,7 +16266,7 @@
         <p:spPr>
           <a:xfrm>
             <a:off x="1691640" y="1399032"/>
-            <a:ext cx="365760" cy="0"/>
+            <a:ext cx="365760" cy="9144"/>
           </a:xfrm>
           <a:prstGeom prst="line">
             <a:avLst/>
@@ -16494,7 +16494,7 @@
         <p:spPr>
           <a:xfrm>
             <a:off x="3566160" y="1399032"/>
-            <a:ext cx="365760" cy="0"/>
+            <a:ext cx="365760" cy="9144"/>
           </a:xfrm>
           <a:prstGeom prst="line">
             <a:avLst/>
@@ -16739,7 +16739,7 @@
         <p:spPr>
           <a:xfrm>
             <a:off x="5623560" y="1399032"/>
-            <a:ext cx="365760" cy="0"/>
+            <a:ext cx="365760" cy="9144"/>
           </a:xfrm>
           <a:prstGeom prst="line">
             <a:avLst/>
@@ -16984,7 +16984,7 @@
         <p:spPr>
           <a:xfrm>
             <a:off x="7635240" y="1399032"/>
-            <a:ext cx="365760" cy="0"/>
+            <a:ext cx="365760" cy="9144"/>
           </a:xfrm>
           <a:prstGeom prst="line">
             <a:avLst/>
@@ -19979,7 +19979,7 @@
         <p:spPr>
           <a:xfrm>
             <a:off x="1536192" y="1527048"/>
-            <a:ext cx="73152" cy="0"/>
+            <a:ext cx="73152" cy="9144"/>
           </a:xfrm>
           <a:prstGeom prst="line">
             <a:avLst/>
@@ -20003,7 +20003,7 @@
         <p:spPr>
           <a:xfrm>
             <a:off x="1536192" y="2029968"/>
-            <a:ext cx="73152" cy="0"/>
+            <a:ext cx="73152" cy="9144"/>
           </a:xfrm>
           <a:prstGeom prst="line">
             <a:avLst/>
@@ -20027,7 +20027,7 @@
         <p:spPr>
           <a:xfrm>
             <a:off x="1536192" y="2532888"/>
-            <a:ext cx="73152" cy="0"/>
+            <a:ext cx="73152" cy="9144"/>
           </a:xfrm>
           <a:prstGeom prst="line">
             <a:avLst/>
@@ -20216,7 +20216,7 @@
         <p:spPr>
           <a:xfrm>
             <a:off x="2670048" y="2167128"/>
-            <a:ext cx="182880" cy="0"/>
+            <a:ext cx="182880" cy="9144"/>
           </a:xfrm>
           <a:prstGeom prst="line">
             <a:avLst/>
@@ -20646,7 +20646,7 @@
         <p:spPr>
           <a:xfrm>
             <a:off x="6263640" y="1764792"/>
-            <a:ext cx="347472" cy="0"/>
+            <a:ext cx="347472" cy="9144"/>
           </a:xfrm>
           <a:prstGeom prst="line">
             <a:avLst/>
@@ -21918,7 +21918,7 @@
         <p:spPr>
           <a:xfrm>
             <a:off x="2121408" y="1965960"/>
-            <a:ext cx="438912" cy="0"/>
+            <a:ext cx="438912" cy="9144"/>
           </a:xfrm>
           <a:prstGeom prst="line">
             <a:avLst/>
@@ -22214,7 +22214,7 @@
         <p:spPr>
           <a:xfrm>
             <a:off x="4133088" y="1984248"/>
-            <a:ext cx="411480" cy="0"/>
+            <a:ext cx="411480" cy="9144"/>
           </a:xfrm>
           <a:prstGeom prst="line">
             <a:avLst/>
@@ -22476,7 +22476,7 @@
         <p:spPr>
           <a:xfrm>
             <a:off x="5943600" y="1920240"/>
-            <a:ext cx="347472" cy="0"/>
+            <a:ext cx="347472" cy="9144"/>
           </a:xfrm>
           <a:prstGeom prst="line">
             <a:avLst/>
@@ -22699,7 +22699,7 @@
         <p:spPr>
           <a:xfrm>
             <a:off x="7845552" y="1984248"/>
-            <a:ext cx="320040" cy="0"/>
+            <a:ext cx="320040" cy="9144"/>
           </a:xfrm>
           <a:prstGeom prst="line">
             <a:avLst/>
@@ -23710,7 +23710,7 @@
         <p:spPr>
           <a:xfrm>
             <a:off x="2578608" y="1883664"/>
-            <a:ext cx="0" cy="128016"/>
+            <a:ext cx="9144" cy="128016"/>
           </a:xfrm>
           <a:prstGeom prst="line">
             <a:avLst/>
@@ -24064,7 +24064,7 @@
         <p:spPr>
           <a:xfrm>
             <a:off x="2578608" y="2907792"/>
-            <a:ext cx="0" cy="128016"/>
+            <a:ext cx="9144" cy="128016"/>
           </a:xfrm>
           <a:prstGeom prst="line">
             <a:avLst/>
